--- a/ゲーム科1年/00_前期/ゲームプログラミングⅢ/ゲーム数学/座学/07_円と球.pptx
+++ b/ゲーム科1年/00_前期/ゲームプログラミングⅢ/ゲーム数学/座学/07_円と球.pptx
@@ -266,7 +266,7 @@
           <a:p>
             <a:fld id="{E9CC885B-4903-4D54-9A93-00025F12DED9}" type="datetimeFigureOut">
               <a:rPr kumimoji="1" lang="ja-JP" altLang="en-US" smtClean="0"/>
-              <a:t>2024/10/3</a:t>
+              <a:t>2025/6/19</a:t>
             </a:fld>
             <a:endParaRPr kumimoji="1" lang="ja-JP" altLang="en-US"/>
           </a:p>
@@ -496,7 +496,7 @@
           <a:p>
             <a:fld id="{E9CC885B-4903-4D54-9A93-00025F12DED9}" type="datetimeFigureOut">
               <a:rPr kumimoji="1" lang="ja-JP" altLang="en-US" smtClean="0"/>
-              <a:t>2024/10/3</a:t>
+              <a:t>2025/6/19</a:t>
             </a:fld>
             <a:endParaRPr kumimoji="1" lang="ja-JP" altLang="en-US"/>
           </a:p>
@@ -736,7 +736,7 @@
           <a:p>
             <a:fld id="{E9CC885B-4903-4D54-9A93-00025F12DED9}" type="datetimeFigureOut">
               <a:rPr kumimoji="1" lang="ja-JP" altLang="en-US" smtClean="0"/>
-              <a:t>2024/10/3</a:t>
+              <a:t>2025/6/19</a:t>
             </a:fld>
             <a:endParaRPr kumimoji="1" lang="ja-JP" altLang="en-US"/>
           </a:p>
@@ -966,7 +966,7 @@
           <a:p>
             <a:fld id="{E9CC885B-4903-4D54-9A93-00025F12DED9}" type="datetimeFigureOut">
               <a:rPr kumimoji="1" lang="ja-JP" altLang="en-US" smtClean="0"/>
-              <a:t>2024/10/3</a:t>
+              <a:t>2025/6/19</a:t>
             </a:fld>
             <a:endParaRPr kumimoji="1" lang="ja-JP" altLang="en-US"/>
           </a:p>
@@ -1241,7 +1241,7 @@
           <a:p>
             <a:fld id="{E9CC885B-4903-4D54-9A93-00025F12DED9}" type="datetimeFigureOut">
               <a:rPr kumimoji="1" lang="ja-JP" altLang="en-US" smtClean="0"/>
-              <a:t>2024/10/3</a:t>
+              <a:t>2025/6/19</a:t>
             </a:fld>
             <a:endParaRPr kumimoji="1" lang="ja-JP" altLang="en-US"/>
           </a:p>
@@ -1570,7 +1570,7 @@
           <a:p>
             <a:fld id="{E9CC885B-4903-4D54-9A93-00025F12DED9}" type="datetimeFigureOut">
               <a:rPr kumimoji="1" lang="ja-JP" altLang="en-US" smtClean="0"/>
-              <a:t>2024/10/3</a:t>
+              <a:t>2025/6/19</a:t>
             </a:fld>
             <a:endParaRPr kumimoji="1" lang="ja-JP" altLang="en-US"/>
           </a:p>
@@ -2046,7 +2046,7 @@
           <a:p>
             <a:fld id="{E9CC885B-4903-4D54-9A93-00025F12DED9}" type="datetimeFigureOut">
               <a:rPr kumimoji="1" lang="ja-JP" altLang="en-US" smtClean="0"/>
-              <a:t>2024/10/3</a:t>
+              <a:t>2025/6/19</a:t>
             </a:fld>
             <a:endParaRPr kumimoji="1" lang="ja-JP" altLang="en-US"/>
           </a:p>
@@ -2187,7 +2187,7 @@
           <a:p>
             <a:fld id="{E9CC885B-4903-4D54-9A93-00025F12DED9}" type="datetimeFigureOut">
               <a:rPr kumimoji="1" lang="ja-JP" altLang="en-US" smtClean="0"/>
-              <a:t>2024/10/3</a:t>
+              <a:t>2025/6/19</a:t>
             </a:fld>
             <a:endParaRPr kumimoji="1" lang="ja-JP" altLang="en-US"/>
           </a:p>
@@ -2300,7 +2300,7 @@
           <a:p>
             <a:fld id="{E9CC885B-4903-4D54-9A93-00025F12DED9}" type="datetimeFigureOut">
               <a:rPr kumimoji="1" lang="ja-JP" altLang="en-US" smtClean="0"/>
-              <a:t>2024/10/3</a:t>
+              <a:t>2025/6/19</a:t>
             </a:fld>
             <a:endParaRPr kumimoji="1" lang="ja-JP" altLang="en-US"/>
           </a:p>
@@ -2643,7 +2643,7 @@
           <a:p>
             <a:fld id="{E9CC885B-4903-4D54-9A93-00025F12DED9}" type="datetimeFigureOut">
               <a:rPr kumimoji="1" lang="ja-JP" altLang="en-US" smtClean="0"/>
-              <a:t>2024/10/3</a:t>
+              <a:t>2025/6/19</a:t>
             </a:fld>
             <a:endParaRPr kumimoji="1" lang="ja-JP" altLang="en-US"/>
           </a:p>
@@ -2931,7 +2931,7 @@
           <a:p>
             <a:fld id="{E9CC885B-4903-4D54-9A93-00025F12DED9}" type="datetimeFigureOut">
               <a:rPr kumimoji="1" lang="ja-JP" altLang="en-US" smtClean="0"/>
-              <a:t>2024/10/3</a:t>
+              <a:t>2025/6/19</a:t>
             </a:fld>
             <a:endParaRPr kumimoji="1" lang="ja-JP" altLang="en-US"/>
           </a:p>
@@ -3204,7 +3204,7 @@
           <a:p>
             <a:fld id="{E9CC885B-4903-4D54-9A93-00025F12DED9}" type="datetimeFigureOut">
               <a:rPr kumimoji="1" lang="ja-JP" altLang="en-US" smtClean="0"/>
-              <a:t>2024/10/3</a:t>
+              <a:t>2025/6/19</a:t>
             </a:fld>
             <a:endParaRPr kumimoji="1" lang="ja-JP" altLang="en-US"/>
           </a:p>
@@ -3623,6 +3623,60 @@
       </p:grpSpPr>
       <p:sp>
         <p:nvSpPr>
+          <p:cNvPr id="2" name="四角形: 角を丸くする 1">
+            <a:extLst>
+              <a:ext uri="{FF2B5EF4-FFF2-40B4-BE49-F238E27FC236}">
+                <a16:creationId xmlns:a16="http://schemas.microsoft.com/office/drawing/2014/main" id="{CF0AC4EA-5CAB-432B-9F92-9E719972A1FA}"/>
+              </a:ext>
+            </a:extLst>
+          </p:cNvPr>
+          <p:cNvSpPr/>
+          <p:nvPr/>
+        </p:nvSpPr>
+        <p:spPr>
+          <a:xfrm>
+            <a:off x="288141" y="1803400"/>
+            <a:ext cx="7365725" cy="1625600"/>
+          </a:xfrm>
+          <a:prstGeom prst="roundRect">
+            <a:avLst/>
+          </a:prstGeom>
+          <a:solidFill>
+            <a:schemeClr val="bg1">
+              <a:lumMod val="85000"/>
+            </a:schemeClr>
+          </a:solidFill>
+          <a:ln>
+            <a:noFill/>
+          </a:ln>
+        </p:spPr>
+        <p:style>
+          <a:lnRef idx="2">
+            <a:schemeClr val="accent1">
+              <a:shade val="50000"/>
+            </a:schemeClr>
+          </a:lnRef>
+          <a:fillRef idx="1">
+            <a:schemeClr val="accent1"/>
+          </a:fillRef>
+          <a:effectRef idx="0">
+            <a:schemeClr val="accent1"/>
+          </a:effectRef>
+          <a:fontRef idx="minor">
+            <a:schemeClr val="lt1"/>
+          </a:fontRef>
+        </p:style>
+        <p:txBody>
+          <a:bodyPr rtlCol="0" anchor="ctr"/>
+          <a:lstStyle/>
+          <a:p>
+            <a:pPr algn="ctr"/>
+            <a:endParaRPr kumimoji="1" lang="ja-JP" altLang="en-US"/>
+          </a:p>
+        </p:txBody>
+      </p:sp>
+      <p:sp>
+        <p:nvSpPr>
           <p:cNvPr id="4" name="テキスト ボックス 3">
             <a:extLst>
               <a:ext uri="{FF2B5EF4-FFF2-40B4-BE49-F238E27FC236}">
@@ -3657,8 +3711,8 @@
           </a:p>
         </p:txBody>
       </p:sp>
-      <mc:AlternateContent xmlns:mc="http://schemas.openxmlformats.org/markup-compatibility/2006">
-        <mc:Choice xmlns:a14="http://schemas.microsoft.com/office/drawing/2010/main" Requires="a14">
+      <mc:AlternateContent xmlns:mc="http://schemas.openxmlformats.org/markup-compatibility/2006" xmlns:a14="http://schemas.microsoft.com/office/drawing/2010/main">
+        <mc:Choice Requires="a14">
           <p:sp>
             <p:nvSpPr>
               <p:cNvPr id="6" name="テキスト ボックス 5">
@@ -3993,13 +4047,7 @@
                       <a:rPr lang="en-US" altLang="ja-JP" sz="2400" i="1">
                         <a:latin typeface="Cambria Math" panose="02040503050406030204" pitchFamily="18" charset="0"/>
                       </a:rPr>
-                      <m:t>0</m:t>
-                    </m:r>
-                    <m:r>
-                      <a:rPr lang="en-US" altLang="ja-JP" sz="2400" i="1">
-                        <a:latin typeface="Cambria Math" panose="02040503050406030204" pitchFamily="18" charset="0"/>
-                      </a:rPr>
-                      <m:t>)</m:t>
+                      <m:t>0)</m:t>
                     </m:r>
                   </m:oMath>
                 </a14:m>
@@ -4107,7 +4155,7 @@
             </p:txBody>
           </p:sp>
         </mc:Choice>
-        <mc:Fallback>
+        <mc:Fallback xmlns="">
           <p:sp>
             <p:nvSpPr>
               <p:cNvPr id="6" name="テキスト ボックス 5">
@@ -4218,8 +4266,8 @@
           </a:p>
         </p:txBody>
       </p:sp>
-      <mc:AlternateContent xmlns:mc="http://schemas.openxmlformats.org/markup-compatibility/2006">
-        <mc:Choice xmlns:a14="http://schemas.microsoft.com/office/drawing/2010/main" Requires="a14">
+      <mc:AlternateContent xmlns:mc="http://schemas.openxmlformats.org/markup-compatibility/2006" xmlns:a14="http://schemas.microsoft.com/office/drawing/2010/main">
+        <mc:Choice Requires="a14">
           <p:sp>
             <p:nvSpPr>
               <p:cNvPr id="6" name="テキスト ボックス 5">
@@ -4756,7 +4804,7 @@
             </p:txBody>
           </p:sp>
         </mc:Choice>
-        <mc:Fallback>
+        <mc:Fallback xmlns="">
           <p:sp>
             <p:nvSpPr>
               <p:cNvPr id="6" name="テキスト ボックス 5">
@@ -4923,8 +4971,8 @@
             </a:p>
           </p:txBody>
         </p:sp>
-        <mc:AlternateContent xmlns:mc="http://schemas.openxmlformats.org/markup-compatibility/2006">
-          <mc:Choice xmlns:a14="http://schemas.microsoft.com/office/drawing/2010/main" Requires="a14">
+        <mc:AlternateContent xmlns:mc="http://schemas.openxmlformats.org/markup-compatibility/2006" xmlns:a14="http://schemas.microsoft.com/office/drawing/2010/main">
+          <mc:Choice Requires="a14">
             <p:sp>
               <p:nvSpPr>
                 <p:cNvPr id="7" name="テキスト ボックス 6">
@@ -4953,6 +5001,7 @@
                 </a:bodyPr>
                 <a:lstStyle/>
                 <a:p>
+                  <a:pPr/>
                   <a14:m>
                     <m:oMathPara xmlns:m="http://schemas.openxmlformats.org/officeDocument/2006/math">
                       <m:oMathParaPr>
@@ -5012,7 +5061,7 @@
               </p:txBody>
             </p:sp>
           </mc:Choice>
-          <mc:Fallback>
+          <mc:Fallback xmlns="">
             <p:sp>
               <p:nvSpPr>
                 <p:cNvPr id="7" name="テキスト ボックス 6">
@@ -5096,8 +5145,8 @@
             </a:fontRef>
           </p:style>
         </p:cxnSp>
-        <mc:AlternateContent xmlns:mc="http://schemas.openxmlformats.org/markup-compatibility/2006">
-          <mc:Choice xmlns:a14="http://schemas.microsoft.com/office/drawing/2010/main" Requires="a14">
+        <mc:AlternateContent xmlns:mc="http://schemas.openxmlformats.org/markup-compatibility/2006" xmlns:a14="http://schemas.microsoft.com/office/drawing/2010/main">
+          <mc:Choice Requires="a14">
             <p:sp>
               <p:nvSpPr>
                 <p:cNvPr id="11" name="テキスト ボックス 10">
@@ -5126,6 +5175,7 @@
                 </a:bodyPr>
                 <a:lstStyle/>
                 <a:p>
+                  <a:pPr/>
                   <a14:m>
                     <m:oMathPara xmlns:m="http://schemas.openxmlformats.org/officeDocument/2006/math">
                       <m:oMathParaPr>
@@ -5153,7 +5203,7 @@
               </p:txBody>
             </p:sp>
           </mc:Choice>
-          <mc:Fallback>
+          <mc:Fallback xmlns="">
             <p:sp>
               <p:nvSpPr>
                 <p:cNvPr id="11" name="テキスト ボックス 10">
@@ -5265,8 +5315,8 @@
           </a:p>
         </p:txBody>
       </p:sp>
-      <mc:AlternateContent xmlns:mc="http://schemas.openxmlformats.org/markup-compatibility/2006">
-        <mc:Choice xmlns:a14="http://schemas.microsoft.com/office/drawing/2010/main" Requires="a14">
+      <mc:AlternateContent xmlns:mc="http://schemas.openxmlformats.org/markup-compatibility/2006" xmlns:a14="http://schemas.microsoft.com/office/drawing/2010/main">
+        <mc:Choice Requires="a14">
           <p:sp>
             <p:nvSpPr>
               <p:cNvPr id="6" name="テキスト ボックス 5">
@@ -5680,7 +5730,7 @@
             </p:txBody>
           </p:sp>
         </mc:Choice>
-        <mc:Fallback>
+        <mc:Fallback xmlns="">
           <p:sp>
             <p:nvSpPr>
               <p:cNvPr id="6" name="テキスト ボックス 5">
@@ -6037,8 +6087,8 @@
             </a:p>
           </p:txBody>
         </p:sp>
-        <mc:AlternateContent xmlns:mc="http://schemas.openxmlformats.org/markup-compatibility/2006">
-          <mc:Choice xmlns:a14="http://schemas.microsoft.com/office/drawing/2010/main" Requires="a14">
+        <mc:AlternateContent xmlns:mc="http://schemas.openxmlformats.org/markup-compatibility/2006" xmlns:a14="http://schemas.microsoft.com/office/drawing/2010/main">
+          <mc:Choice Requires="a14">
             <p:sp>
               <p:nvSpPr>
                 <p:cNvPr id="8" name="テキスト ボックス 7">
@@ -6067,6 +6117,7 @@
                 </a:bodyPr>
                 <a:lstStyle/>
                 <a:p>
+                  <a:pPr/>
                   <a14:m>
                     <m:oMathPara xmlns:m="http://schemas.openxmlformats.org/officeDocument/2006/math">
                       <m:oMathParaPr>
@@ -6092,16 +6143,7 @@
                                 </a:solidFill>
                                 <a:latin typeface="Cambria Math" panose="02040503050406030204" pitchFamily="18" charset="0"/>
                               </a:rPr>
-                              <m:t>2</m:t>
-                            </m:r>
-                            <m:r>
-                              <a:rPr lang="en-US" altLang="ja-JP" b="0" i="1" smtClean="0">
-                                <a:solidFill>
-                                  <a:schemeClr val="tx1"/>
-                                </a:solidFill>
-                                <a:latin typeface="Cambria Math" panose="02040503050406030204" pitchFamily="18" charset="0"/>
-                              </a:rPr>
-                              <m:t>0</m:t>
+                              <m:t>20</m:t>
                             </m:r>
                             <m:r>
                               <a:rPr lang="en-US" altLang="ja-JP" b="0" i="1">
@@ -6135,7 +6177,7 @@
               </p:txBody>
             </p:sp>
           </mc:Choice>
-          <mc:Fallback>
+          <mc:Fallback xmlns="">
             <p:sp>
               <p:nvSpPr>
                 <p:cNvPr id="8" name="テキスト ボックス 7">
@@ -6180,8 +6222,8 @@
             </p:sp>
           </mc:Fallback>
         </mc:AlternateContent>
-        <mc:AlternateContent xmlns:mc="http://schemas.openxmlformats.org/markup-compatibility/2006">
-          <mc:Choice xmlns:a14="http://schemas.microsoft.com/office/drawing/2010/main" Requires="a14">
+        <mc:AlternateContent xmlns:mc="http://schemas.openxmlformats.org/markup-compatibility/2006" xmlns:a14="http://schemas.microsoft.com/office/drawing/2010/main">
+          <mc:Choice Requires="a14">
             <p:sp>
               <p:nvSpPr>
                 <p:cNvPr id="9" name="テキスト ボックス 8">
@@ -6210,6 +6252,7 @@
                 </a:bodyPr>
                 <a:lstStyle/>
                 <a:p>
+                  <a:pPr/>
                   <a14:m>
                     <m:oMathPara xmlns:m="http://schemas.openxmlformats.org/officeDocument/2006/math">
                       <m:oMathParaPr>
@@ -6269,7 +6312,7 @@
               </p:txBody>
             </p:sp>
           </mc:Choice>
-          <mc:Fallback>
+          <mc:Fallback xmlns="">
             <p:sp>
               <p:nvSpPr>
                 <p:cNvPr id="9" name="テキスト ボックス 8">
@@ -6381,8 +6424,8 @@
           </a:p>
         </p:txBody>
       </p:sp>
-      <mc:AlternateContent xmlns:mc="http://schemas.openxmlformats.org/markup-compatibility/2006">
-        <mc:Choice xmlns:a14="http://schemas.microsoft.com/office/drawing/2010/main" Requires="a14">
+      <mc:AlternateContent xmlns:mc="http://schemas.openxmlformats.org/markup-compatibility/2006" xmlns:a14="http://schemas.microsoft.com/office/drawing/2010/main">
+        <mc:Choice Requires="a14">
           <p:sp>
             <p:nvSpPr>
               <p:cNvPr id="6" name="テキスト ボックス 5">
@@ -6485,13 +6528,7 @@
                           <a:rPr lang="en-US" altLang="ja-JP" sz="2400" i="1">
                             <a:latin typeface="Cambria Math" panose="02040503050406030204" pitchFamily="18" charset="0"/>
                           </a:rPr>
-                          <m:t>, </m:t>
-                        </m:r>
-                        <m:r>
-                          <a:rPr lang="en-US" altLang="ja-JP" sz="2400" i="1">
-                            <a:latin typeface="Cambria Math" panose="02040503050406030204" pitchFamily="18" charset="0"/>
-                          </a:rPr>
-                          <m:t>80</m:t>
+                          <m:t>, 80</m:t>
                         </m:r>
                       </m:e>
                     </m:d>
@@ -6821,7 +6858,7 @@
             </p:txBody>
           </p:sp>
         </mc:Choice>
-        <mc:Fallback>
+        <mc:Fallback xmlns="">
           <p:sp>
             <p:nvSpPr>
               <p:cNvPr id="6" name="テキスト ボックス 5">
@@ -7042,8 +7079,8 @@
             </a:p>
           </p:txBody>
         </p:sp>
-        <mc:AlternateContent xmlns:mc="http://schemas.openxmlformats.org/markup-compatibility/2006">
-          <mc:Choice xmlns:a14="http://schemas.microsoft.com/office/drawing/2010/main" Requires="a14">
+        <mc:AlternateContent xmlns:mc="http://schemas.openxmlformats.org/markup-compatibility/2006" xmlns:a14="http://schemas.microsoft.com/office/drawing/2010/main">
+          <mc:Choice Requires="a14">
             <p:sp>
               <p:nvSpPr>
                 <p:cNvPr id="14" name="テキスト ボックス 13">
@@ -7072,6 +7109,7 @@
                 </a:bodyPr>
                 <a:lstStyle/>
                 <a:p>
+                  <a:pPr/>
                   <a14:m>
                     <m:oMathPara xmlns:m="http://schemas.openxmlformats.org/officeDocument/2006/math">
                       <m:oMathParaPr>
@@ -7097,16 +7135,7 @@
                                 </a:solidFill>
                                 <a:latin typeface="Cambria Math" panose="02040503050406030204" pitchFamily="18" charset="0"/>
                               </a:rPr>
-                              <m:t>2</m:t>
-                            </m:r>
-                            <m:r>
-                              <a:rPr lang="en-US" altLang="ja-JP" b="0" i="1" smtClean="0">
-                                <a:solidFill>
-                                  <a:schemeClr val="tx1"/>
-                                </a:solidFill>
-                                <a:latin typeface="Cambria Math" panose="02040503050406030204" pitchFamily="18" charset="0"/>
-                              </a:rPr>
-                              <m:t>0</m:t>
+                              <m:t>20</m:t>
                             </m:r>
                             <m:r>
                               <a:rPr lang="en-US" altLang="ja-JP" b="0" i="1">
@@ -7140,7 +7169,7 @@
               </p:txBody>
             </p:sp>
           </mc:Choice>
-          <mc:Fallback>
+          <mc:Fallback xmlns="">
             <p:sp>
               <p:nvSpPr>
                 <p:cNvPr id="14" name="テキスト ボックス 13">
@@ -7185,8 +7214,8 @@
             </p:sp>
           </mc:Fallback>
         </mc:AlternateContent>
-        <mc:AlternateContent xmlns:mc="http://schemas.openxmlformats.org/markup-compatibility/2006">
-          <mc:Choice xmlns:a14="http://schemas.microsoft.com/office/drawing/2010/main" Requires="a14">
+        <mc:AlternateContent xmlns:mc="http://schemas.openxmlformats.org/markup-compatibility/2006" xmlns:a14="http://schemas.microsoft.com/office/drawing/2010/main">
+          <mc:Choice Requires="a14">
             <p:sp>
               <p:nvSpPr>
                 <p:cNvPr id="15" name="テキスト ボックス 14">
@@ -7215,6 +7244,7 @@
                 </a:bodyPr>
                 <a:lstStyle/>
                 <a:p>
+                  <a:pPr/>
                   <a14:m>
                     <m:oMathPara xmlns:m="http://schemas.openxmlformats.org/officeDocument/2006/math">
                       <m:oMathParaPr>
@@ -7274,7 +7304,7 @@
               </p:txBody>
             </p:sp>
           </mc:Choice>
-          <mc:Fallback>
+          <mc:Fallback xmlns="">
             <p:sp>
               <p:nvSpPr>
                 <p:cNvPr id="15" name="テキスト ボックス 14">
@@ -7359,8 +7389,8 @@
           </a:fontRef>
         </p:style>
       </p:cxnSp>
-      <mc:AlternateContent xmlns:mc="http://schemas.openxmlformats.org/markup-compatibility/2006">
-        <mc:Choice xmlns:a14="http://schemas.microsoft.com/office/drawing/2010/main" Requires="a14">
+      <mc:AlternateContent xmlns:mc="http://schemas.openxmlformats.org/markup-compatibility/2006" xmlns:a14="http://schemas.microsoft.com/office/drawing/2010/main">
+        <mc:Choice Requires="a14">
           <p:sp>
             <p:nvSpPr>
               <p:cNvPr id="19" name="テキスト ボックス 18">
@@ -7389,6 +7419,7 @@
               </a:bodyPr>
               <a:lstStyle/>
               <a:p>
+                <a:pPr/>
                 <a14:m>
                   <m:oMathPara xmlns:m="http://schemas.openxmlformats.org/officeDocument/2006/math">
                     <m:oMathParaPr>
@@ -7429,7 +7460,7 @@
             </p:txBody>
           </p:sp>
         </mc:Choice>
-        <mc:Fallback>
+        <mc:Fallback xmlns="">
           <p:sp>
             <p:nvSpPr>
               <p:cNvPr id="19" name="テキスト ボックス 18">
@@ -7540,8 +7571,8 @@
           </a:p>
         </p:txBody>
       </p:sp>
-      <mc:AlternateContent xmlns:mc="http://schemas.openxmlformats.org/markup-compatibility/2006">
-        <mc:Choice xmlns:a14="http://schemas.microsoft.com/office/drawing/2010/main" Requires="a14">
+      <mc:AlternateContent xmlns:mc="http://schemas.openxmlformats.org/markup-compatibility/2006" xmlns:a14="http://schemas.microsoft.com/office/drawing/2010/main">
+        <mc:Choice Requires="a14">
           <p:sp>
             <p:nvSpPr>
               <p:cNvPr id="6" name="テキスト ボックス 5">
@@ -7644,13 +7675,7 @@
                           <a:rPr lang="en-US" altLang="ja-JP" sz="2400" i="1">
                             <a:latin typeface="Cambria Math" panose="02040503050406030204" pitchFamily="18" charset="0"/>
                           </a:rPr>
-                          <m:t>, </m:t>
-                        </m:r>
-                        <m:r>
-                          <a:rPr lang="en-US" altLang="ja-JP" sz="2400" i="1">
-                            <a:latin typeface="Cambria Math" panose="02040503050406030204" pitchFamily="18" charset="0"/>
-                          </a:rPr>
-                          <m:t>80</m:t>
+                          <m:t>, 80</m:t>
                         </m:r>
                       </m:e>
                     </m:d>
@@ -8171,7 +8196,7 @@
             </p:txBody>
           </p:sp>
         </mc:Choice>
-        <mc:Fallback>
+        <mc:Fallback xmlns="">
           <p:sp>
             <p:nvSpPr>
               <p:cNvPr id="6" name="テキスト ボックス 5">
@@ -8282,8 +8307,8 @@
           </a:p>
         </p:txBody>
       </p:sp>
-      <mc:AlternateContent xmlns:mc="http://schemas.openxmlformats.org/markup-compatibility/2006">
-        <mc:Choice xmlns:a14="http://schemas.microsoft.com/office/drawing/2010/main" Requires="a14">
+      <mc:AlternateContent xmlns:mc="http://schemas.openxmlformats.org/markup-compatibility/2006" xmlns:a14="http://schemas.microsoft.com/office/drawing/2010/main">
+        <mc:Choice Requires="a14">
           <p:sp>
             <p:nvSpPr>
               <p:cNvPr id="6" name="テキスト ボックス 5">
@@ -8379,7 +8404,7 @@
             </p:txBody>
           </p:sp>
         </mc:Choice>
-        <mc:Fallback>
+        <mc:Fallback xmlns="">
           <p:sp>
             <p:nvSpPr>
               <p:cNvPr id="6" name="テキスト ボックス 5">
@@ -8600,8 +8625,8 @@
             </a:p>
           </p:txBody>
         </p:sp>
-        <mc:AlternateContent xmlns:mc="http://schemas.openxmlformats.org/markup-compatibility/2006">
-          <mc:Choice xmlns:a14="http://schemas.microsoft.com/office/drawing/2010/main" Requires="a14">
+        <mc:AlternateContent xmlns:mc="http://schemas.openxmlformats.org/markup-compatibility/2006" xmlns:a14="http://schemas.microsoft.com/office/drawing/2010/main">
+          <mc:Choice Requires="a14">
             <p:sp>
               <p:nvSpPr>
                 <p:cNvPr id="10" name="テキスト ボックス 9">
@@ -8630,6 +8655,7 @@
                 </a:bodyPr>
                 <a:lstStyle/>
                 <a:p>
+                  <a:pPr/>
                   <a14:m>
                     <m:oMathPara xmlns:m="http://schemas.openxmlformats.org/officeDocument/2006/math">
                       <m:oMathParaPr>
@@ -8689,7 +8715,7 @@
               </p:txBody>
             </p:sp>
           </mc:Choice>
-          <mc:Fallback>
+          <mc:Fallback xmlns="">
             <p:sp>
               <p:nvSpPr>
                 <p:cNvPr id="10" name="テキスト ボックス 9">
@@ -8734,8 +8760,8 @@
             </p:sp>
           </mc:Fallback>
         </mc:AlternateContent>
-        <mc:AlternateContent xmlns:mc="http://schemas.openxmlformats.org/markup-compatibility/2006">
-          <mc:Choice xmlns:a14="http://schemas.microsoft.com/office/drawing/2010/main" Requires="a14">
+        <mc:AlternateContent xmlns:mc="http://schemas.openxmlformats.org/markup-compatibility/2006" xmlns:a14="http://schemas.microsoft.com/office/drawing/2010/main">
+          <mc:Choice Requires="a14">
             <p:sp>
               <p:nvSpPr>
                 <p:cNvPr id="11" name="テキスト ボックス 10">
@@ -8764,6 +8790,7 @@
                 </a:bodyPr>
                 <a:lstStyle/>
                 <a:p>
+                  <a:pPr/>
                   <a14:m>
                     <m:oMathPara xmlns:m="http://schemas.openxmlformats.org/officeDocument/2006/math">
                       <m:oMathParaPr>
@@ -8823,7 +8850,7 @@
               </p:txBody>
             </p:sp>
           </mc:Choice>
-          <mc:Fallback>
+          <mc:Fallback xmlns="">
             <p:sp>
               <p:nvSpPr>
                 <p:cNvPr id="11" name="テキスト ボックス 10">
@@ -8935,8 +8962,8 @@
           </a:p>
         </p:txBody>
       </p:sp>
-      <mc:AlternateContent xmlns:mc="http://schemas.openxmlformats.org/markup-compatibility/2006">
-        <mc:Choice xmlns:a14="http://schemas.microsoft.com/office/drawing/2010/main" Requires="a14">
+      <mc:AlternateContent xmlns:mc="http://schemas.openxmlformats.org/markup-compatibility/2006" xmlns:a14="http://schemas.microsoft.com/office/drawing/2010/main">
+        <mc:Choice Requires="a14">
           <p:sp>
             <p:nvSpPr>
               <p:cNvPr id="5" name="テキスト ボックス 4">
@@ -9496,7 +9523,7 @@
             </p:txBody>
           </p:sp>
         </mc:Choice>
-        <mc:Fallback>
+        <mc:Fallback xmlns="">
           <p:sp>
             <p:nvSpPr>
               <p:cNvPr id="5" name="テキスト ボックス 4">

--- a/ゲーム科1年/00_前期/ゲームプログラミングⅢ/ゲーム数学/座学/07_円と球.pptx
+++ b/ゲーム科1年/00_前期/ゲームプログラミングⅢ/ゲーム数学/座学/07_円と球.pptx
@@ -266,7 +266,7 @@
           <a:p>
             <a:fld id="{E9CC885B-4903-4D54-9A93-00025F12DED9}" type="datetimeFigureOut">
               <a:rPr kumimoji="1" lang="ja-JP" altLang="en-US" smtClean="0"/>
-              <a:t>2025/6/19</a:t>
+              <a:t>2026/5/19</a:t>
             </a:fld>
             <a:endParaRPr kumimoji="1" lang="ja-JP" altLang="en-US"/>
           </a:p>
@@ -496,7 +496,7 @@
           <a:p>
             <a:fld id="{E9CC885B-4903-4D54-9A93-00025F12DED9}" type="datetimeFigureOut">
               <a:rPr kumimoji="1" lang="ja-JP" altLang="en-US" smtClean="0"/>
-              <a:t>2025/6/19</a:t>
+              <a:t>2026/5/19</a:t>
             </a:fld>
             <a:endParaRPr kumimoji="1" lang="ja-JP" altLang="en-US"/>
           </a:p>
@@ -736,7 +736,7 @@
           <a:p>
             <a:fld id="{E9CC885B-4903-4D54-9A93-00025F12DED9}" type="datetimeFigureOut">
               <a:rPr kumimoji="1" lang="ja-JP" altLang="en-US" smtClean="0"/>
-              <a:t>2025/6/19</a:t>
+              <a:t>2026/5/19</a:t>
             </a:fld>
             <a:endParaRPr kumimoji="1" lang="ja-JP" altLang="en-US"/>
           </a:p>
@@ -966,7 +966,7 @@
           <a:p>
             <a:fld id="{E9CC885B-4903-4D54-9A93-00025F12DED9}" type="datetimeFigureOut">
               <a:rPr kumimoji="1" lang="ja-JP" altLang="en-US" smtClean="0"/>
-              <a:t>2025/6/19</a:t>
+              <a:t>2026/5/19</a:t>
             </a:fld>
             <a:endParaRPr kumimoji="1" lang="ja-JP" altLang="en-US"/>
           </a:p>
@@ -1241,7 +1241,7 @@
           <a:p>
             <a:fld id="{E9CC885B-4903-4D54-9A93-00025F12DED9}" type="datetimeFigureOut">
               <a:rPr kumimoji="1" lang="ja-JP" altLang="en-US" smtClean="0"/>
-              <a:t>2025/6/19</a:t>
+              <a:t>2026/5/19</a:t>
             </a:fld>
             <a:endParaRPr kumimoji="1" lang="ja-JP" altLang="en-US"/>
           </a:p>
@@ -1570,7 +1570,7 @@
           <a:p>
             <a:fld id="{E9CC885B-4903-4D54-9A93-00025F12DED9}" type="datetimeFigureOut">
               <a:rPr kumimoji="1" lang="ja-JP" altLang="en-US" smtClean="0"/>
-              <a:t>2025/6/19</a:t>
+              <a:t>2026/5/19</a:t>
             </a:fld>
             <a:endParaRPr kumimoji="1" lang="ja-JP" altLang="en-US"/>
           </a:p>
@@ -2046,7 +2046,7 @@
           <a:p>
             <a:fld id="{E9CC885B-4903-4D54-9A93-00025F12DED9}" type="datetimeFigureOut">
               <a:rPr kumimoji="1" lang="ja-JP" altLang="en-US" smtClean="0"/>
-              <a:t>2025/6/19</a:t>
+              <a:t>2026/5/19</a:t>
             </a:fld>
             <a:endParaRPr kumimoji="1" lang="ja-JP" altLang="en-US"/>
           </a:p>
@@ -2187,7 +2187,7 @@
           <a:p>
             <a:fld id="{E9CC885B-4903-4D54-9A93-00025F12DED9}" type="datetimeFigureOut">
               <a:rPr kumimoji="1" lang="ja-JP" altLang="en-US" smtClean="0"/>
-              <a:t>2025/6/19</a:t>
+              <a:t>2026/5/19</a:t>
             </a:fld>
             <a:endParaRPr kumimoji="1" lang="ja-JP" altLang="en-US"/>
           </a:p>
@@ -2300,7 +2300,7 @@
           <a:p>
             <a:fld id="{E9CC885B-4903-4D54-9A93-00025F12DED9}" type="datetimeFigureOut">
               <a:rPr kumimoji="1" lang="ja-JP" altLang="en-US" smtClean="0"/>
-              <a:t>2025/6/19</a:t>
+              <a:t>2026/5/19</a:t>
             </a:fld>
             <a:endParaRPr kumimoji="1" lang="ja-JP" altLang="en-US"/>
           </a:p>
@@ -2643,7 +2643,7 @@
           <a:p>
             <a:fld id="{E9CC885B-4903-4D54-9A93-00025F12DED9}" type="datetimeFigureOut">
               <a:rPr kumimoji="1" lang="ja-JP" altLang="en-US" smtClean="0"/>
-              <a:t>2025/6/19</a:t>
+              <a:t>2026/5/19</a:t>
             </a:fld>
             <a:endParaRPr kumimoji="1" lang="ja-JP" altLang="en-US"/>
           </a:p>
@@ -2931,7 +2931,7 @@
           <a:p>
             <a:fld id="{E9CC885B-4903-4D54-9A93-00025F12DED9}" type="datetimeFigureOut">
               <a:rPr kumimoji="1" lang="ja-JP" altLang="en-US" smtClean="0"/>
-              <a:t>2025/6/19</a:t>
+              <a:t>2026/5/19</a:t>
             </a:fld>
             <a:endParaRPr kumimoji="1" lang="ja-JP" altLang="en-US"/>
           </a:p>
@@ -3204,7 +3204,7 @@
           <a:p>
             <a:fld id="{E9CC885B-4903-4D54-9A93-00025F12DED9}" type="datetimeFigureOut">
               <a:rPr kumimoji="1" lang="ja-JP" altLang="en-US" smtClean="0"/>
-              <a:t>2025/6/19</a:t>
+              <a:t>2026/5/19</a:t>
             </a:fld>
             <a:endParaRPr kumimoji="1" lang="ja-JP" altLang="en-US"/>
           </a:p>
@@ -8928,6 +8928,60 @@
       </p:grpSpPr>
       <p:sp>
         <p:nvSpPr>
+          <p:cNvPr id="6" name="四角形: 角を丸くする 5">
+            <a:extLst>
+              <a:ext uri="{FF2B5EF4-FFF2-40B4-BE49-F238E27FC236}">
+                <a16:creationId xmlns:a16="http://schemas.microsoft.com/office/drawing/2014/main" id="{1324A309-EF84-4A27-A441-6EDE520FB071}"/>
+              </a:ext>
+            </a:extLst>
+          </p:cNvPr>
+          <p:cNvSpPr/>
+          <p:nvPr/>
+        </p:nvSpPr>
+        <p:spPr>
+          <a:xfrm>
+            <a:off x="288141" y="1803400"/>
+            <a:ext cx="7365725" cy="1625600"/>
+          </a:xfrm>
+          <a:prstGeom prst="roundRect">
+            <a:avLst/>
+          </a:prstGeom>
+          <a:solidFill>
+            <a:schemeClr val="bg1">
+              <a:lumMod val="85000"/>
+            </a:schemeClr>
+          </a:solidFill>
+          <a:ln>
+            <a:noFill/>
+          </a:ln>
+        </p:spPr>
+        <p:style>
+          <a:lnRef idx="2">
+            <a:schemeClr val="accent1">
+              <a:shade val="50000"/>
+            </a:schemeClr>
+          </a:lnRef>
+          <a:fillRef idx="1">
+            <a:schemeClr val="accent1"/>
+          </a:fillRef>
+          <a:effectRef idx="0">
+            <a:schemeClr val="accent1"/>
+          </a:effectRef>
+          <a:fontRef idx="minor">
+            <a:schemeClr val="lt1"/>
+          </a:fontRef>
+        </p:style>
+        <p:txBody>
+          <a:bodyPr rtlCol="0" anchor="ctr"/>
+          <a:lstStyle/>
+          <a:p>
+            <a:pPr algn="ctr"/>
+            <a:endParaRPr kumimoji="1" lang="ja-JP" altLang="en-US"/>
+          </a:p>
+        </p:txBody>
+      </p:sp>
+      <p:sp>
+        <p:nvSpPr>
           <p:cNvPr id="4" name="テキスト ボックス 3">
             <a:extLst>
               <a:ext uri="{FF2B5EF4-FFF2-40B4-BE49-F238E27FC236}">
